--- a/paper/praxis06_tta/defense_slides/PRAXIS06_DEFENSE_SLIDES_20260514.pptx
+++ b/paper/praxis06_tta/defense_slides/PRAXIS06_DEFENSE_SLIDES_20260514.pptx
@@ -5538,7 +5538,7 @@
               </a:defRPr>
             </a:pPr>
             <a:r>
-              <a:t>Provenance graph detector claims remain label-blocked.</a:t>
+              <a:t>OpTC provenance labels are ready; detector generalization remains blocked.</a:t>
             </a:r>
           </a:p>
         </p:txBody>
